--- a/Silvec_transmission-dead_CTV_executive_trial003.pptx
+++ b/Silvec_transmission-dead_CTV_executive_trial003.pptx
@@ -685,7 +685,7 @@
           <a:p>
             <a:r>
               <a:rPr lang="en-US" dirty="0"/>
-              <a:t>Why not the coat: two falsifications, plus the binding evidence that redirects design to the tail complex.</a:t>
+              <a:t>Why not the coat: falsified on sequence identity (240/240). Round-3 correction: the 17/90 'functional null' was never in Shilts 2020 — struck from the record. What survives: CPm is still the foregut ligand.</a:t>
             </a:r>
             <a:endParaRPr lang="en-US" dirty="0"/>
           </a:p>
@@ -2773,7 +2773,7 @@
                 <a:ea typeface="Newsreader" pitchFamily="34" charset="-122"/>
                 <a:cs typeface="Newsreader" pitchFamily="34" charset="-120"/>
               </a:rPr>
-              <a:t>The obvious target was falsified first — twice.</a:t>
+              <a:t>The obvious target was falsified on the sequence.</a:t>
             </a:r>
             <a:endParaRPr lang="en-US" sz="2700" dirty="0"/>
           </a:p>
@@ -2812,7 +2812,7 @@
                 <a:ea typeface="Newsreader" pitchFamily="34" charset="-122"/>
                 <a:cs typeface="Newsreader" pitchFamily="34" charset="-120"/>
               </a:rPr>
-              <a:t>CPm, the minor coat protein, was everyone's starting guess. The record killed it cleanly.</a:t>
+              <a:t>CPm, the minor coat protein, was everyone's starting guess. Identity killed it; a second 'test' once cited in support turned out not to exist — and was struck.</a:t>
             </a:r>
             <a:endParaRPr lang="en-US" sz="1200" dirty="0"/>
           </a:p>
@@ -2994,7 +2994,7 @@
                 <a:ea typeface="Newsreader" pitchFamily="34" charset="-122"/>
                 <a:cs typeface="Newsreader" pitchFamily="34" charset="-120"/>
               </a:rPr>
-              <a:t>p = 1.00</a:t>
+              <a:t>WITHDRAWN</a:t>
             </a:r>
             <a:endParaRPr lang="en-US" sz="3400" dirty="0"/>
           </a:p>
@@ -3033,7 +3033,7 @@
                 <a:ea typeface="JetBrains Mono" pitchFamily="34" charset="-122"/>
                 <a:cs typeface="JetBrains Mono" pitchFamily="34" charset="-120"/>
               </a:rPr>
-              <a:t>FUNCTIONAL NULL</a:t>
+              <a:t>THE 17/90 'FUNCTIONAL NULL'</a:t>
             </a:r>
             <a:endParaRPr lang="en-US" sz="700" dirty="0"/>
           </a:p>
@@ -3075,7 +3075,7 @@
                 <a:ea typeface="Newsreader" pitchFamily="34" charset="-122"/>
                 <a:cs typeface="Newsreader" pitchFamily="34" charset="-120"/>
               </a:rPr>
-              <a:t>Adding CPm to the p33 swap changed nothing: 17/90 vs 16/90 (Shilts 2020).</a:t>
+              <a:t>A 17/90 CPm+5′UTR construct was cited from Shilts 2020 — no such construct exists in the paper. The 240/240 identity now carries the coat falsification alone.</a:t>
             </a:r>
             <a:endParaRPr lang="en-US" sz="950" dirty="0"/>
           </a:p>
@@ -4349,7 +4349,7 @@
                 <a:ea typeface="Newsreader" pitchFamily="34" charset="-122"/>
                 <a:cs typeface="Newsreader" pitchFamily="34" charset="-120"/>
               </a:rPr>
-              <a:t>largest verified effect, published protocol, pre-registered pass line. B is the cheap parallel bet; C inherits A's map. K174R — the residue an abstract once named — is falsified and appears only in the log.</a:t>
+              <a:t>largest verified effect, published protocol, pre-registered pass line. B is the cheap parallel bet; C inherits A's map. Residue 174 — the 'switch' an abstract once named — fails on sufficiency (T30 carries R174 at 1.57%; Harper's K174-retaining hybrids still transmit 17.9–20.6%). It appears only in the log.</a:t>
             </a:r>
             <a:endParaRPr lang="en-US" sz="1050" dirty="0"/>
           </a:p>
@@ -4836,7 +4836,7 @@
                 <a:ea typeface="Newsreader" pitchFamily="34" charset="-122"/>
                 <a:cs typeface="Newsreader" pitchFamily="34" charset="-120"/>
               </a:rPr>
-              <a:t>CPm, K174R, the charged subset, single-gene-first, the titer story</a:t>
+              <a:t>CPm, the residue-174 switch, the charged subset, single-gene sufficiency, the titer story</a:t>
             </a:r>
             <a:endParaRPr lang="en-US" sz="950" dirty="0"/>
           </a:p>
@@ -5996,7 +5996,7 @@
                 <a:ea typeface="JetBrains Mono" pitchFamily="34" charset="-122"/>
                 <a:cs typeface="JetBrains Mono" pitchFamily="34" charset="-120"/>
               </a:rPr>
-              <a:t>~550–700 APHIDS · TITER ON EVERY SOURCE</a:t>
+              <a:t>~550–700 PLANTS · 5.5–7K APHIDS</a:t>
             </a:r>
             <a:endParaRPr lang="en-US" sz="600" dirty="0"/>
           </a:p>
